--- a/yamibare-pitch.pptx
+++ b/yamibare-pitch.pptx
@@ -2129,12 +2129,12 @@
         </p:nvSpPr>
         <p:spPr>
           <a:xfrm>
-            <a:off x="548640" y="5029200"/>
-            <a:ext cx="11100816" cy="1143000"/>
+            <a:off x="548640" y="4937760"/>
+            <a:ext cx="11100816" cy="1325880"/>
           </a:xfrm>
           <a:prstGeom prst="ROUNDED_RECTANGLE">
             <a:avLst>
-              <a:gd name="adj" fmla="val 9600"/>
+              <a:gd name="adj" fmla="val 8276"/>
             </a:avLst>
           </a:prstGeom>
           <a:solidFill>
@@ -2156,8 +2156,8 @@
         </p:nvSpPr>
         <p:spPr>
           <a:xfrm>
-            <a:off x="868680" y="5193792"/>
-            <a:ext cx="10515600" cy="822960"/>
+            <a:off x="868680" y="5074920"/>
+            <a:ext cx="10515600" cy="1051560"/>
           </a:xfrm>
           <a:prstGeom prst="rect">
             <a:avLst/>
@@ -2171,12 +2171,12 @@
           <a:p>
             <a:pPr indent="0" marL="0">
               <a:lnSpc>
-                <a:spcPts val="2400"/>
+                <a:spcPts val="2300"/>
               </a:lnSpc>
               <a:buNone/>
             </a:pPr>
             <a:r>
-              <a:rPr lang="en-US" sz="1500" b="1" dirty="0">
+              <a:rPr lang="en-US" sz="1450" b="1" dirty="0">
                 <a:solidFill>
                   <a:srgbClr val="EEF1FF"/>
                 </a:solidFill>
@@ -2188,12 +2188,12 @@
             </a:r>
             <a:pPr indent="0" marL="0">
               <a:lnSpc>
-                <a:spcPts val="2400"/>
+                <a:spcPts val="2300"/>
               </a:lnSpc>
               <a:buNone/>
             </a:pPr>
             <a:r>
-              <a:rPr lang="en-US" sz="1500" dirty="0">
+              <a:rPr lang="en-US" sz="1450" dirty="0">
                 <a:solidFill>
                   <a:srgbClr val="9AA3C7"/>
                 </a:solidFill>
@@ -2201,9 +2201,26 @@
                 <a:ea typeface="Yu Gothic" pitchFamily="34" charset="-122"/>
                 <a:cs typeface="Yu Gothic" pitchFamily="34" charset="-120"/>
               </a:rPr>
-              <a:t>それでも既存の啓発はポスター・講習など高齢者向けの一方向のまま。「自分は騙されない」と思っている若者には届かない。</a:t>
-            </a:r>
-            <a:endParaRPr lang="en-US" sz="1500" dirty="0"/>
+              <a:t>入口は日常のSNS広告だ。国は2026年8月7日、8省庁連名でGoogle・Meta・TikTok・X・LINEヤフーに「なりすまし詐欺広告」対策を要請した。</a:t>
+            </a:r>
+            <a:pPr indent="0" marL="0">
+              <a:lnSpc>
+                <a:spcPts val="2300"/>
+              </a:lnSpc>
+              <a:buNone/>
+            </a:pPr>
+            <a:r>
+              <a:rPr lang="en-US" sz="1450" b="1" dirty="0">
+                <a:solidFill>
+                  <a:srgbClr val="FFD54D"/>
+                </a:solidFill>
+                <a:latin typeface="Yu Gothic" pitchFamily="34" charset="0"/>
+                <a:ea typeface="Yu Gothic" pitchFamily="34" charset="-122"/>
+                <a:cs typeface="Yu Gothic" pitchFamily="34" charset="-120"/>
+              </a:rPr>
+              <a:t>だがそれは事業者側の対策。いま自分に届いた広告を確かめる手段は、利用者にない。</a:t>
+            </a:r>
+            <a:endParaRPr lang="en-US" sz="1450" dirty="0"/>
           </a:p>
         </p:txBody>
       </p:sp>
@@ -4199,12 +4216,12 @@
         </p:nvSpPr>
         <p:spPr>
           <a:xfrm>
-            <a:off x="548640" y="1920240"/>
-            <a:ext cx="11100816" cy="1207008"/>
+            <a:off x="548640" y="1828800"/>
+            <a:ext cx="11100816" cy="969264"/>
           </a:xfrm>
           <a:prstGeom prst="ROUNDED_RECTANGLE">
             <a:avLst>
-              <a:gd name="adj" fmla="val 9091"/>
+              <a:gd name="adj" fmla="val 11321"/>
             </a:avLst>
           </a:prstGeom>
           <a:solidFill>
@@ -4226,24 +4243,24 @@
         </p:nvSpPr>
         <p:spPr>
           <a:xfrm>
-            <a:off x="822960" y="2066544"/>
-            <a:ext cx="1371600" cy="411480"/>
-          </a:xfrm>
-          <a:prstGeom prst="rect">
-            <a:avLst/>
-          </a:prstGeom>
-          <a:noFill/>
-          <a:ln/>
-        </p:spPr>
-        <p:txBody>
-          <a:bodyPr wrap="square" lIns="0" tIns="0" rIns="0" bIns="0" rtlCol="0" anchor="ctr"/>
-          <a:lstStyle/>
-          <a:p>
-            <a:pPr indent="0" marL="0">
-              <a:buNone/>
-            </a:pPr>
-            <a:r>
-              <a:rPr lang="en-US" sz="1600" b="1" dirty="0">
+            <a:off x="822960" y="1920240"/>
+            <a:ext cx="1371600" cy="347472"/>
+          </a:xfrm>
+          <a:prstGeom prst="rect">
+            <a:avLst/>
+          </a:prstGeom>
+          <a:noFill/>
+          <a:ln/>
+        </p:spPr>
+        <p:txBody>
+          <a:bodyPr wrap="square" lIns="0" tIns="0" rIns="0" bIns="0" rtlCol="0" anchor="ctr"/>
+          <a:lstStyle/>
+          <a:p>
+            <a:pPr indent="0" marL="0">
+              <a:buNone/>
+            </a:pPr>
+            <a:r>
+              <a:rPr lang="en-US" sz="1450" b="1" dirty="0">
                 <a:solidFill>
                   <a:srgbClr val="EEF1FF"/>
                 </a:solidFill>
@@ -4253,7 +4270,7 @@
               </a:rPr>
               <a:t>警視庁</a:t>
             </a:r>
-            <a:endParaRPr lang="en-US" sz="1600" dirty="0"/>
+            <a:endParaRPr lang="en-US" sz="1450" dirty="0"/>
           </a:p>
         </p:txBody>
       </p:sp>
@@ -4265,12 +4282,12 @@
         </p:nvSpPr>
         <p:spPr>
           <a:xfrm>
-            <a:off x="822960" y="2578608"/>
-            <a:ext cx="1051560" cy="365760"/>
+            <a:off x="822960" y="2331720"/>
+            <a:ext cx="1005840" cy="329184"/>
           </a:xfrm>
           <a:prstGeom prst="ROUNDED_RECTANGLE">
             <a:avLst>
-              <a:gd name="adj" fmla="val 20000"/>
+              <a:gd name="adj" fmla="val 22222"/>
             </a:avLst>
           </a:prstGeom>
           <a:solidFill>
@@ -4287,8 +4304,8 @@
         </p:nvSpPr>
         <p:spPr>
           <a:xfrm>
-            <a:off x="822960" y="2578608"/>
-            <a:ext cx="1051560" cy="365760"/>
+            <a:off x="822960" y="2331720"/>
+            <a:ext cx="1005840" cy="329184"/>
           </a:xfrm>
           <a:prstGeom prst="rect">
             <a:avLst/>
@@ -4304,7 +4321,7 @@
               <a:buNone/>
             </a:pPr>
             <a:r>
-              <a:rPr lang="en-US" sz="1100" b="1" dirty="0">
+              <a:rPr lang="en-US" sz="1000" b="1" dirty="0">
                 <a:solidFill>
                   <a:srgbClr val="0D1020"/>
                 </a:solidFill>
@@ -4314,105 +4331,105 @@
               </a:rPr>
               <a:t>利用中</a:t>
             </a:r>
+            <a:endParaRPr lang="en-US" sz="1000" dirty="0"/>
+          </a:p>
+        </p:txBody>
+      </p:sp>
+      <p:sp>
+        <p:nvSpPr>
+          <p:cNvPr id="8" name="Text 6"/>
+          <p:cNvSpPr/>
+          <p:nvPr/>
+        </p:nvSpPr>
+        <p:spPr>
+          <a:xfrm>
+            <a:off x="2240280" y="1920240"/>
+            <a:ext cx="9235440" cy="365760"/>
+          </a:xfrm>
+          <a:prstGeom prst="rect">
+            <a:avLst/>
+          </a:prstGeom>
+          <a:noFill/>
+          <a:ln/>
+        </p:spPr>
+        <p:txBody>
+          <a:bodyPr wrap="square" lIns="0" tIns="0" rIns="0" bIns="0" rtlCol="0" anchor="ctr"/>
+          <a:lstStyle/>
+          <a:p>
+            <a:pPr indent="0" marL="0">
+              <a:buNone/>
+            </a:pPr>
+            <a:r>
+              <a:rPr lang="en-US" sz="1250" b="1" dirty="0">
+                <a:solidFill>
+                  <a:srgbClr val="FFD54D"/>
+                </a:solidFill>
+                <a:latin typeface="Yu Gothic" pitchFamily="34" charset="0"/>
+                <a:ea typeface="Yu Gothic" pitchFamily="34" charset="-122"/>
+                <a:cs typeface="Yu Gothic" pitchFamily="34" charset="-120"/>
+              </a:rPr>
+              <a:t>区市町村の町丁別・手口別認知件数(令和7年CSV)</a:t>
+            </a:r>
+            <a:endParaRPr lang="en-US" sz="1250" dirty="0"/>
+          </a:p>
+        </p:txBody>
+      </p:sp>
+      <p:sp>
+        <p:nvSpPr>
+          <p:cNvPr id="9" name="Text 7"/>
+          <p:cNvSpPr/>
+          <p:nvPr/>
+        </p:nvSpPr>
+        <p:spPr>
+          <a:xfrm>
+            <a:off x="2240280" y="2286000"/>
+            <a:ext cx="9235440" cy="457200"/>
+          </a:xfrm>
+          <a:prstGeom prst="rect">
+            <a:avLst/>
+          </a:prstGeom>
+          <a:noFill/>
+          <a:ln/>
+        </p:spPr>
+        <p:txBody>
+          <a:bodyPr wrap="square" lIns="0" tIns="0" rIns="0" bIns="0" rtlCol="0" anchor="ctr"/>
+          <a:lstStyle/>
+          <a:p>
+            <a:pPr indent="0" marL="0">
+              <a:lnSpc>
+                <a:spcPts val="1500"/>
+              </a:lnSpc>
+              <a:buNone/>
+            </a:pPr>
+            <a:r>
+              <a:rPr lang="en-US" sz="1100" dirty="0">
+                <a:solidFill>
+                  <a:srgbClr val="9AA3C7"/>
+                </a:solidFill>
+                <a:latin typeface="Yu Gothic" pitchFamily="34" charset="0"/>
+                <a:ea typeface="Yu Gothic" pitchFamily="34" charset="-122"/>
+                <a:cs typeface="Yu Gothic" pitchFamily="34" charset="-120"/>
+              </a:rPr>
+              <a:t>59区市町村+町丁TOP3を自動集計して内蔵。「わがまち」を選ぶと判定根拠が自分の街の実数に変わる(都内計10,521件)</a:t>
+            </a:r>
             <a:endParaRPr lang="en-US" sz="1100" dirty="0"/>
           </a:p>
         </p:txBody>
       </p:sp>
       <p:sp>
         <p:nvSpPr>
-          <p:cNvPr id="8" name="Text 6"/>
-          <p:cNvSpPr/>
-          <p:nvPr/>
-        </p:nvSpPr>
-        <p:spPr>
-          <a:xfrm>
-            <a:off x="2286000" y="2066544"/>
-            <a:ext cx="9144000" cy="411480"/>
-          </a:xfrm>
-          <a:prstGeom prst="rect">
-            <a:avLst/>
-          </a:prstGeom>
-          <a:noFill/>
-          <a:ln/>
-        </p:spPr>
-        <p:txBody>
-          <a:bodyPr wrap="square" lIns="0" tIns="0" rIns="0" bIns="0" rtlCol="0" anchor="ctr"/>
-          <a:lstStyle/>
-          <a:p>
-            <a:pPr indent="0" marL="0">
-              <a:buNone/>
-            </a:pPr>
-            <a:r>
-              <a:rPr lang="en-US" sz="1400" b="1" dirty="0">
-                <a:solidFill>
-                  <a:srgbClr val="FFD54D"/>
-                </a:solidFill>
-                <a:latin typeface="Yu Gothic" pitchFamily="34" charset="0"/>
-                <a:ea typeface="Yu Gothic" pitchFamily="34" charset="-122"/>
-                <a:cs typeface="Yu Gothic" pitchFamily="34" charset="-120"/>
-              </a:rPr>
-              <a:t>区市町村の町丁別・手口別認知件数(令和7年CSV)</a:t>
-            </a:r>
-            <a:endParaRPr lang="en-US" sz="1400" dirty="0"/>
-          </a:p>
-        </p:txBody>
-      </p:sp>
-      <p:sp>
-        <p:nvSpPr>
-          <p:cNvPr id="9" name="Text 7"/>
-          <p:cNvSpPr/>
-          <p:nvPr/>
-        </p:nvSpPr>
-        <p:spPr>
-          <a:xfrm>
-            <a:off x="2286000" y="2487168"/>
-            <a:ext cx="9144000" cy="548640"/>
-          </a:xfrm>
-          <a:prstGeom prst="rect">
-            <a:avLst/>
-          </a:prstGeom>
-          <a:noFill/>
-          <a:ln/>
-        </p:spPr>
-        <p:txBody>
-          <a:bodyPr wrap="square" lIns="0" tIns="0" rIns="0" bIns="0" rtlCol="0" anchor="ctr"/>
-          <a:lstStyle/>
-          <a:p>
-            <a:pPr indent="0" marL="0">
-              <a:lnSpc>
-                <a:spcPts val="1700"/>
-              </a:lnSpc>
-              <a:buNone/>
-            </a:pPr>
-            <a:r>
-              <a:rPr lang="en-US" sz="1200" dirty="0">
-                <a:solidFill>
-                  <a:srgbClr val="9AA3C7"/>
-                </a:solidFill>
-                <a:latin typeface="Yu Gothic" pitchFamily="34" charset="0"/>
-                <a:ea typeface="Yu Gothic" pitchFamily="34" charset="-122"/>
-                <a:cs typeface="Yu Gothic" pitchFamily="34" charset="-120"/>
-              </a:rPr>
-              <a:t>59区市町村+町丁TOP3を自動集計して内蔵。「わがまち」を選ぶと判定根拠が自分の街の実数に変わる(都内計10,521件)</a:t>
-            </a:r>
-            <a:endParaRPr lang="en-US" sz="1200" dirty="0"/>
-          </a:p>
-        </p:txBody>
-      </p:sp>
-      <p:sp>
-        <p:nvSpPr>
           <p:cNvPr id="10" name="Shape 8"/>
           <p:cNvSpPr/>
           <p:nvPr/>
         </p:nvSpPr>
         <p:spPr>
           <a:xfrm>
-            <a:off x="548640" y="3291840"/>
-            <a:ext cx="11100816" cy="1207008"/>
+            <a:off x="548640" y="2907792"/>
+            <a:ext cx="11100816" cy="969264"/>
           </a:xfrm>
           <a:prstGeom prst="ROUNDED_RECTANGLE">
             <a:avLst>
-              <a:gd name="adj" fmla="val 9091"/>
+              <a:gd name="adj" fmla="val 11321"/>
             </a:avLst>
           </a:prstGeom>
           <a:solidFill>
@@ -4434,24 +4451,24 @@
         </p:nvSpPr>
         <p:spPr>
           <a:xfrm>
-            <a:off x="822960" y="3438144"/>
-            <a:ext cx="1371600" cy="411480"/>
-          </a:xfrm>
-          <a:prstGeom prst="rect">
-            <a:avLst/>
-          </a:prstGeom>
-          <a:noFill/>
-          <a:ln/>
-        </p:spPr>
-        <p:txBody>
-          <a:bodyPr wrap="square" lIns="0" tIns="0" rIns="0" bIns="0" rtlCol="0" anchor="ctr"/>
-          <a:lstStyle/>
-          <a:p>
-            <a:pPr indent="0" marL="0">
-              <a:buNone/>
-            </a:pPr>
-            <a:r>
-              <a:rPr lang="en-US" sz="1600" b="1" dirty="0">
+            <a:off x="822960" y="2999232"/>
+            <a:ext cx="1371600" cy="347472"/>
+          </a:xfrm>
+          <a:prstGeom prst="rect">
+            <a:avLst/>
+          </a:prstGeom>
+          <a:noFill/>
+          <a:ln/>
+        </p:spPr>
+        <p:txBody>
+          <a:bodyPr wrap="square" lIns="0" tIns="0" rIns="0" bIns="0" rtlCol="0" anchor="ctr"/>
+          <a:lstStyle/>
+          <a:p>
+            <a:pPr indent="0" marL="0">
+              <a:buNone/>
+            </a:pPr>
+            <a:r>
+              <a:rPr lang="en-US" sz="1450" b="1" dirty="0">
                 <a:solidFill>
                   <a:srgbClr val="EEF1FF"/>
                 </a:solidFill>
@@ -4461,7 +4478,7 @@
               </a:rPr>
               <a:t>警察庁</a:t>
             </a:r>
-            <a:endParaRPr lang="en-US" sz="1600" dirty="0"/>
+            <a:endParaRPr lang="en-US" sz="1450" dirty="0"/>
           </a:p>
         </p:txBody>
       </p:sp>
@@ -4473,12 +4490,12 @@
         </p:nvSpPr>
         <p:spPr>
           <a:xfrm>
-            <a:off x="822960" y="3950208"/>
-            <a:ext cx="1051560" cy="365760"/>
+            <a:off x="822960" y="3410712"/>
+            <a:ext cx="1005840" cy="329184"/>
           </a:xfrm>
           <a:prstGeom prst="ROUNDED_RECTANGLE">
             <a:avLst>
-              <a:gd name="adj" fmla="val 20000"/>
+              <a:gd name="adj" fmla="val 22222"/>
             </a:avLst>
           </a:prstGeom>
           <a:solidFill>
@@ -4495,8 +4512,8 @@
         </p:nvSpPr>
         <p:spPr>
           <a:xfrm>
-            <a:off x="822960" y="3950208"/>
-            <a:ext cx="1051560" cy="365760"/>
+            <a:off x="822960" y="3410712"/>
+            <a:ext cx="1005840" cy="329184"/>
           </a:xfrm>
           <a:prstGeom prst="rect">
             <a:avLst/>
@@ -4512,7 +4529,7 @@
               <a:buNone/>
             </a:pPr>
             <a:r>
-              <a:rPr lang="en-US" sz="1100" b="1" dirty="0">
+              <a:rPr lang="en-US" sz="1000" b="1" dirty="0">
                 <a:solidFill>
                   <a:srgbClr val="0D1020"/>
                 </a:solidFill>
@@ -4522,105 +4539,105 @@
               </a:rPr>
               <a:t>利用中</a:t>
             </a:r>
+            <a:endParaRPr lang="en-US" sz="1000" dirty="0"/>
+          </a:p>
+        </p:txBody>
+      </p:sp>
+      <p:sp>
+        <p:nvSpPr>
+          <p:cNvPr id="14" name="Text 12"/>
+          <p:cNvSpPr/>
+          <p:nvPr/>
+        </p:nvSpPr>
+        <p:spPr>
+          <a:xfrm>
+            <a:off x="2240280" y="2999232"/>
+            <a:ext cx="9235440" cy="365760"/>
+          </a:xfrm>
+          <a:prstGeom prst="rect">
+            <a:avLst/>
+          </a:prstGeom>
+          <a:noFill/>
+          <a:ln/>
+        </p:spPr>
+        <p:txBody>
+          <a:bodyPr wrap="square" lIns="0" tIns="0" rIns="0" bIns="0" rtlCol="0" anchor="ctr"/>
+          <a:lstStyle/>
+          <a:p>
+            <a:pPr indent="0" marL="0">
+              <a:buNone/>
+            </a:pPr>
+            <a:r>
+              <a:rPr lang="en-US" sz="1250" b="1" dirty="0">
+                <a:solidFill>
+                  <a:srgbClr val="FFD54D"/>
+                </a:solidFill>
+                <a:latin typeface="Yu Gothic" pitchFamily="34" charset="0"/>
+                <a:ea typeface="Yu Gothic" pitchFamily="34" charset="-122"/>
+                <a:cs typeface="Yu Gothic" pitchFamily="34" charset="-120"/>
+              </a:rPr>
+              <a:t>特殊詐欺・SNS型投資/ロマンス詐欺 認知・検挙状況(令和7年確定値)</a:t>
+            </a:r>
+            <a:endParaRPr lang="en-US" sz="1250" dirty="0"/>
+          </a:p>
+        </p:txBody>
+      </p:sp>
+      <p:sp>
+        <p:nvSpPr>
+          <p:cNvPr id="15" name="Text 13"/>
+          <p:cNvSpPr/>
+          <p:nvPr/>
+        </p:nvSpPr>
+        <p:spPr>
+          <a:xfrm>
+            <a:off x="2240280" y="3364992"/>
+            <a:ext cx="9235440" cy="457200"/>
+          </a:xfrm>
+          <a:prstGeom prst="rect">
+            <a:avLst/>
+          </a:prstGeom>
+          <a:noFill/>
+          <a:ln/>
+        </p:spPr>
+        <p:txBody>
+          <a:bodyPr wrap="square" lIns="0" tIns="0" rIns="0" bIns="0" rtlCol="0" anchor="ctr"/>
+          <a:lstStyle/>
+          <a:p>
+            <a:pPr indent="0" marL="0">
+              <a:lnSpc>
+                <a:spcPts val="1500"/>
+              </a:lnSpc>
+              <a:buNone/>
+            </a:pPr>
+            <a:r>
+              <a:rPr lang="en-US" sz="1100" dirty="0">
+                <a:solidFill>
+                  <a:srgbClr val="9AA3C7"/>
+                </a:solidFill>
+                <a:latin typeface="Yu Gothic" pitchFamily="34" charset="0"/>
+                <a:ea typeface="Yu Gothic" pitchFamily="34" charset="-122"/>
+                <a:cs typeface="Yu Gothic" pitchFamily="34" charset="-120"/>
+              </a:rPr>
+              <a:t>年代別・手口別の実数を判定カードに表示。「30代最多・20代2位」など若者への根拠提示の核</a:t>
+            </a:r>
             <a:endParaRPr lang="en-US" sz="1100" dirty="0"/>
           </a:p>
         </p:txBody>
       </p:sp>
       <p:sp>
         <p:nvSpPr>
-          <p:cNvPr id="14" name="Text 12"/>
-          <p:cNvSpPr/>
-          <p:nvPr/>
-        </p:nvSpPr>
-        <p:spPr>
-          <a:xfrm>
-            <a:off x="2286000" y="3438144"/>
-            <a:ext cx="9144000" cy="411480"/>
-          </a:xfrm>
-          <a:prstGeom prst="rect">
-            <a:avLst/>
-          </a:prstGeom>
-          <a:noFill/>
-          <a:ln/>
-        </p:spPr>
-        <p:txBody>
-          <a:bodyPr wrap="square" lIns="0" tIns="0" rIns="0" bIns="0" rtlCol="0" anchor="ctr"/>
-          <a:lstStyle/>
-          <a:p>
-            <a:pPr indent="0" marL="0">
-              <a:buNone/>
-            </a:pPr>
-            <a:r>
-              <a:rPr lang="en-US" sz="1400" b="1" dirty="0">
-                <a:solidFill>
-                  <a:srgbClr val="FFD54D"/>
-                </a:solidFill>
-                <a:latin typeface="Yu Gothic" pitchFamily="34" charset="0"/>
-                <a:ea typeface="Yu Gothic" pitchFamily="34" charset="-122"/>
-                <a:cs typeface="Yu Gothic" pitchFamily="34" charset="-120"/>
-              </a:rPr>
-              <a:t>特殊詐欺・SNS型投資/ロマンス詐欺 認知・検挙状況(令和7年確定値)</a:t>
-            </a:r>
-            <a:endParaRPr lang="en-US" sz="1400" dirty="0"/>
-          </a:p>
-        </p:txBody>
-      </p:sp>
-      <p:sp>
-        <p:nvSpPr>
-          <p:cNvPr id="15" name="Text 13"/>
-          <p:cNvSpPr/>
-          <p:nvPr/>
-        </p:nvSpPr>
-        <p:spPr>
-          <a:xfrm>
-            <a:off x="2286000" y="3858768"/>
-            <a:ext cx="9144000" cy="548640"/>
-          </a:xfrm>
-          <a:prstGeom prst="rect">
-            <a:avLst/>
-          </a:prstGeom>
-          <a:noFill/>
-          <a:ln/>
-        </p:spPr>
-        <p:txBody>
-          <a:bodyPr wrap="square" lIns="0" tIns="0" rIns="0" bIns="0" rtlCol="0" anchor="ctr"/>
-          <a:lstStyle/>
-          <a:p>
-            <a:pPr indent="0" marL="0">
-              <a:lnSpc>
-                <a:spcPts val="1700"/>
-              </a:lnSpc>
-              <a:buNone/>
-            </a:pPr>
-            <a:r>
-              <a:rPr lang="en-US" sz="1200" dirty="0">
-                <a:solidFill>
-                  <a:srgbClr val="9AA3C7"/>
-                </a:solidFill>
-                <a:latin typeface="Yu Gothic" pitchFamily="34" charset="0"/>
-                <a:ea typeface="Yu Gothic" pitchFamily="34" charset="-122"/>
-                <a:cs typeface="Yu Gothic" pitchFamily="34" charset="-120"/>
-              </a:rPr>
-              <a:t>年代別・手口別の実数を判定カードに表示。「30代最多・20代2位」など若者への根拠提示の核</a:t>
-            </a:r>
-            <a:endParaRPr lang="en-US" sz="1200" dirty="0"/>
-          </a:p>
-        </p:txBody>
-      </p:sp>
-      <p:sp>
-        <p:nvSpPr>
           <p:cNvPr id="16" name="Shape 14"/>
           <p:cNvSpPr/>
           <p:nvPr/>
         </p:nvSpPr>
         <p:spPr>
           <a:xfrm>
-            <a:off x="548640" y="4663440"/>
-            <a:ext cx="11100816" cy="1207008"/>
+            <a:off x="548640" y="3986784"/>
+            <a:ext cx="11100816" cy="969264"/>
           </a:xfrm>
           <a:prstGeom prst="ROUNDED_RECTANGLE">
             <a:avLst>
-              <a:gd name="adj" fmla="val 9091"/>
+              <a:gd name="adj" fmla="val 11321"/>
             </a:avLst>
           </a:prstGeom>
           <a:solidFill>
@@ -4642,24 +4659,24 @@
         </p:nvSpPr>
         <p:spPr>
           <a:xfrm>
-            <a:off x="822960" y="4809744"/>
-            <a:ext cx="1371600" cy="411480"/>
-          </a:xfrm>
-          <a:prstGeom prst="rect">
-            <a:avLst/>
-          </a:prstGeom>
-          <a:noFill/>
-          <a:ln/>
-        </p:spPr>
-        <p:txBody>
-          <a:bodyPr wrap="square" lIns="0" tIns="0" rIns="0" bIns="0" rtlCol="0" anchor="ctr"/>
-          <a:lstStyle/>
-          <a:p>
-            <a:pPr indent="0" marL="0">
-              <a:buNone/>
-            </a:pPr>
-            <a:r>
-              <a:rPr lang="en-US" sz="1600" b="1" dirty="0">
+            <a:off x="822960" y="4078224"/>
+            <a:ext cx="1371600" cy="347472"/>
+          </a:xfrm>
+          <a:prstGeom prst="rect">
+            <a:avLst/>
+          </a:prstGeom>
+          <a:noFill/>
+          <a:ln/>
+        </p:spPr>
+        <p:txBody>
+          <a:bodyPr wrap="square" lIns="0" tIns="0" rIns="0" bIns="0" rtlCol="0" anchor="ctr"/>
+          <a:lstStyle/>
+          <a:p>
+            <a:pPr indent="0" marL="0">
+              <a:buNone/>
+            </a:pPr>
+            <a:r>
+              <a:rPr lang="en-US" sz="1450" b="1" dirty="0">
                 <a:solidFill>
                   <a:srgbClr val="EEF1FF"/>
                 </a:solidFill>
@@ -4667,9 +4684,9 @@
                 <a:ea typeface="Yu Gothic" pitchFamily="34" charset="-122"/>
                 <a:cs typeface="Yu Gothic" pitchFamily="34" charset="-120"/>
               </a:rPr>
-              <a:t>国税庁</a:t>
-            </a:r>
-            <a:endParaRPr lang="en-US" sz="1600" dirty="0"/>
+              <a:t>8省庁</a:t>
+            </a:r>
+            <a:endParaRPr lang="en-US" sz="1450" dirty="0"/>
           </a:p>
         </p:txBody>
       </p:sp>
@@ -4681,12 +4698,220 @@
         </p:nvSpPr>
         <p:spPr>
           <a:xfrm>
-            <a:off x="822960" y="5321808"/>
-            <a:ext cx="1051560" cy="365760"/>
+            <a:off x="822960" y="4489704"/>
+            <a:ext cx="1005840" cy="329184"/>
           </a:xfrm>
           <a:prstGeom prst="ROUNDED_RECTANGLE">
             <a:avLst>
-              <a:gd name="adj" fmla="val 20000"/>
+              <a:gd name="adj" fmla="val 22222"/>
+            </a:avLst>
+          </a:prstGeom>
+          <a:solidFill>
+            <a:srgbClr val="FFD54D"/>
+          </a:solidFill>
+          <a:ln/>
+        </p:spPr>
+      </p:sp>
+      <p:sp>
+        <p:nvSpPr>
+          <p:cNvPr id="19" name="Text 17"/>
+          <p:cNvSpPr/>
+          <p:nvPr/>
+        </p:nvSpPr>
+        <p:spPr>
+          <a:xfrm>
+            <a:off x="822960" y="4489704"/>
+            <a:ext cx="1005840" cy="329184"/>
+          </a:xfrm>
+          <a:prstGeom prst="rect">
+            <a:avLst/>
+          </a:prstGeom>
+          <a:noFill/>
+          <a:ln/>
+        </p:spPr>
+        <p:txBody>
+          <a:bodyPr wrap="square" lIns="0" tIns="0" rIns="0" bIns="0" rtlCol="0" anchor="ctr"/>
+          <a:lstStyle/>
+          <a:p>
+            <a:pPr algn="ctr" indent="0" marL="0">
+              <a:buNone/>
+            </a:pPr>
+            <a:r>
+              <a:rPr lang="en-US" sz="1000" b="1" dirty="0">
+                <a:solidFill>
+                  <a:srgbClr val="0D1020"/>
+                </a:solidFill>
+                <a:latin typeface="Yu Gothic" pitchFamily="34" charset="0"/>
+                <a:ea typeface="Yu Gothic" pitchFamily="34" charset="-122"/>
+                <a:cs typeface="Yu Gothic" pitchFamily="34" charset="-120"/>
+              </a:rPr>
+              <a:t>利用中</a:t>
+            </a:r>
+            <a:endParaRPr lang="en-US" sz="1000" dirty="0"/>
+          </a:p>
+        </p:txBody>
+      </p:sp>
+      <p:sp>
+        <p:nvSpPr>
+          <p:cNvPr id="20" name="Text 18"/>
+          <p:cNvSpPr/>
+          <p:nvPr/>
+        </p:nvSpPr>
+        <p:spPr>
+          <a:xfrm>
+            <a:off x="2240280" y="4078224"/>
+            <a:ext cx="9235440" cy="365760"/>
+          </a:xfrm>
+          <a:prstGeom prst="rect">
+            <a:avLst/>
+          </a:prstGeom>
+          <a:noFill/>
+          <a:ln/>
+        </p:spPr>
+        <p:txBody>
+          <a:bodyPr wrap="square" lIns="0" tIns="0" rIns="0" bIns="0" rtlCol="0" anchor="ctr"/>
+          <a:lstStyle/>
+          <a:p>
+            <a:pPr indent="0" marL="0">
+              <a:buNone/>
+            </a:pPr>
+            <a:r>
+              <a:rPr lang="en-US" sz="1250" b="1" dirty="0">
+                <a:solidFill>
+                  <a:srgbClr val="FFD54D"/>
+                </a:solidFill>
+                <a:latin typeface="Yu Gothic" pitchFamily="34" charset="0"/>
+                <a:ea typeface="Yu Gothic" pitchFamily="34" charset="-122"/>
+                <a:cs typeface="Yu Gothic" pitchFamily="34" charset="-120"/>
+              </a:rPr>
+              <a:t>SNS等におけるなりすまし詐欺広告に関する対策の強化について(要請)/令和8年8月7日</a:t>
+            </a:r>
+            <a:endParaRPr lang="en-US" sz="1250" dirty="0"/>
+          </a:p>
+        </p:txBody>
+      </p:sp>
+      <p:sp>
+        <p:nvSpPr>
+          <p:cNvPr id="21" name="Text 19"/>
+          <p:cNvSpPr/>
+          <p:nvPr/>
+        </p:nvSpPr>
+        <p:spPr>
+          <a:xfrm>
+            <a:off x="2240280" y="4443984"/>
+            <a:ext cx="9235440" cy="457200"/>
+          </a:xfrm>
+          <a:prstGeom prst="rect">
+            <a:avLst/>
+          </a:prstGeom>
+          <a:noFill/>
+          <a:ln/>
+        </p:spPr>
+        <p:txBody>
+          <a:bodyPr wrap="square" lIns="0" tIns="0" rIns="0" bIns="0" rtlCol="0" anchor="ctr"/>
+          <a:lstStyle/>
+          <a:p>
+            <a:pPr indent="0" marL="0">
+              <a:lnSpc>
+                <a:spcPts val="1500"/>
+              </a:lnSpc>
+              <a:buNone/>
+            </a:pPr>
+            <a:r>
+              <a:rPr lang="en-US" sz="1100" dirty="0">
+                <a:solidFill>
+                  <a:srgbClr val="9AA3C7"/>
+                </a:solidFill>
+                <a:latin typeface="Yu Gothic" pitchFamily="34" charset="0"/>
+                <a:ea typeface="Yu Gothic" pitchFamily="34" charset="-122"/>
+                <a:cs typeface="Yu Gothic" pitchFamily="34" charset="-120"/>
+              </a:rPr>
+              <a:t>詐欺の入口となった広告の割合(YouTube27.1%・Instagram16.3%・TikTok10.4%他)を判定根拠に搭載。国の要請=事業者側の対策、ヤミバレ=利用者側の防御</a:t>
+            </a:r>
+            <a:endParaRPr lang="en-US" sz="1100" dirty="0"/>
+          </a:p>
+        </p:txBody>
+      </p:sp>
+      <p:sp>
+        <p:nvSpPr>
+          <p:cNvPr id="22" name="Shape 20"/>
+          <p:cNvSpPr/>
+          <p:nvPr/>
+        </p:nvSpPr>
+        <p:spPr>
+          <a:xfrm>
+            <a:off x="548640" y="5065776"/>
+            <a:ext cx="11100816" cy="969264"/>
+          </a:xfrm>
+          <a:prstGeom prst="ROUNDED_RECTANGLE">
+            <a:avLst>
+              <a:gd name="adj" fmla="val 11321"/>
+            </a:avLst>
+          </a:prstGeom>
+          <a:solidFill>
+            <a:srgbClr val="1E2440"/>
+          </a:solidFill>
+          <a:ln w="12700">
+            <a:solidFill>
+              <a:srgbClr val="2A3155"/>
+            </a:solidFill>
+            <a:prstDash val="solid"/>
+          </a:ln>
+        </p:spPr>
+      </p:sp>
+      <p:sp>
+        <p:nvSpPr>
+          <p:cNvPr id="23" name="Text 21"/>
+          <p:cNvSpPr/>
+          <p:nvPr/>
+        </p:nvSpPr>
+        <p:spPr>
+          <a:xfrm>
+            <a:off x="822960" y="5157216"/>
+            <a:ext cx="1371600" cy="347472"/>
+          </a:xfrm>
+          <a:prstGeom prst="rect">
+            <a:avLst/>
+          </a:prstGeom>
+          <a:noFill/>
+          <a:ln/>
+        </p:spPr>
+        <p:txBody>
+          <a:bodyPr wrap="square" lIns="0" tIns="0" rIns="0" bIns="0" rtlCol="0" anchor="ctr"/>
+          <a:lstStyle/>
+          <a:p>
+            <a:pPr indent="0" marL="0">
+              <a:buNone/>
+            </a:pPr>
+            <a:r>
+              <a:rPr lang="en-US" sz="1450" b="1" dirty="0">
+                <a:solidFill>
+                  <a:srgbClr val="EEF1FF"/>
+                </a:solidFill>
+                <a:latin typeface="Yu Gothic" pitchFamily="34" charset="0"/>
+                <a:ea typeface="Yu Gothic" pitchFamily="34" charset="-122"/>
+                <a:cs typeface="Yu Gothic" pitchFamily="34" charset="-120"/>
+              </a:rPr>
+              <a:t>国税庁</a:t>
+            </a:r>
+            <a:endParaRPr lang="en-US" sz="1450" dirty="0"/>
+          </a:p>
+        </p:txBody>
+      </p:sp>
+      <p:sp>
+        <p:nvSpPr>
+          <p:cNvPr id="24" name="Shape 22"/>
+          <p:cNvSpPr/>
+          <p:nvPr/>
+        </p:nvSpPr>
+        <p:spPr>
+          <a:xfrm>
+            <a:off x="822960" y="5568696"/>
+            <a:ext cx="1005840" cy="329184"/>
+          </a:xfrm>
+          <a:prstGeom prst="ROUNDED_RECTANGLE">
+            <a:avLst>
+              <a:gd name="adj" fmla="val 22222"/>
             </a:avLst>
           </a:prstGeom>
           <a:solidFill>
@@ -4697,14 +4922,14 @@
       </p:sp>
       <p:sp>
         <p:nvSpPr>
-          <p:cNvPr id="19" name="Text 17"/>
-          <p:cNvSpPr/>
-          <p:nvPr/>
-        </p:nvSpPr>
-        <p:spPr>
-          <a:xfrm>
-            <a:off x="822960" y="5321808"/>
-            <a:ext cx="1051560" cy="365760"/>
+          <p:cNvPr id="25" name="Text 23"/>
+          <p:cNvSpPr/>
+          <p:nvPr/>
+        </p:nvSpPr>
+        <p:spPr>
+          <a:xfrm>
+            <a:off x="822960" y="5568696"/>
+            <a:ext cx="1005840" cy="329184"/>
           </a:xfrm>
           <a:prstGeom prst="rect">
             <a:avLst/>
@@ -4720,7 +4945,7 @@
               <a:buNone/>
             </a:pPr>
             <a:r>
-              <a:rPr lang="en-US" sz="1100" b="1" dirty="0">
+              <a:rPr lang="en-US" sz="1000" b="1" dirty="0">
                 <a:solidFill>
                   <a:srgbClr val="0D1020"/>
                 </a:solidFill>
@@ -4730,78 +4955,117 @@
               </a:rPr>
               <a:t>本選実装</a:t>
             </a:r>
+            <a:endParaRPr lang="en-US" sz="1000" dirty="0"/>
+          </a:p>
+        </p:txBody>
+      </p:sp>
+      <p:sp>
+        <p:nvSpPr>
+          <p:cNvPr id="26" name="Text 24"/>
+          <p:cNvSpPr/>
+          <p:nvPr/>
+        </p:nvSpPr>
+        <p:spPr>
+          <a:xfrm>
+            <a:off x="2240280" y="5157216"/>
+            <a:ext cx="9235440" cy="365760"/>
+          </a:xfrm>
+          <a:prstGeom prst="rect">
+            <a:avLst/>
+          </a:prstGeom>
+          <a:noFill/>
+          <a:ln/>
+        </p:spPr>
+        <p:txBody>
+          <a:bodyPr wrap="square" lIns="0" tIns="0" rIns="0" bIns="0" rtlCol="0" anchor="ctr"/>
+          <a:lstStyle/>
+          <a:p>
+            <a:pPr indent="0" marL="0">
+              <a:buNone/>
+            </a:pPr>
+            <a:r>
+              <a:rPr lang="en-US" sz="1250" b="1" dirty="0">
+                <a:solidFill>
+                  <a:srgbClr val="FFD54D"/>
+                </a:solidFill>
+                <a:latin typeface="Yu Gothic" pitchFamily="34" charset="0"/>
+                <a:ea typeface="Yu Gothic" pitchFamily="34" charset="-122"/>
+                <a:cs typeface="Yu Gothic" pitchFamily="34" charset="-120"/>
+              </a:rPr>
+              <a:t>法人番号公表サイト Web-API</a:t>
+            </a:r>
+            <a:endParaRPr lang="en-US" sz="1250" dirty="0"/>
+          </a:p>
+        </p:txBody>
+      </p:sp>
+      <p:sp>
+        <p:nvSpPr>
+          <p:cNvPr id="27" name="Text 25"/>
+          <p:cNvSpPr/>
+          <p:nvPr/>
+        </p:nvSpPr>
+        <p:spPr>
+          <a:xfrm>
+            <a:off x="2240280" y="5522976"/>
+            <a:ext cx="9235440" cy="457200"/>
+          </a:xfrm>
+          <a:prstGeom prst="rect">
+            <a:avLst/>
+          </a:prstGeom>
+          <a:noFill/>
+          <a:ln/>
+        </p:spPr>
+        <p:txBody>
+          <a:bodyPr wrap="square" lIns="0" tIns="0" rIns="0" bIns="0" rtlCol="0" anchor="ctr"/>
+          <a:lstStyle/>
+          <a:p>
+            <a:pPr indent="0" marL="0">
+              <a:lnSpc>
+                <a:spcPts val="1500"/>
+              </a:lnSpc>
+              <a:buNone/>
+            </a:pPr>
+            <a:r>
+              <a:rPr lang="en-US" sz="1100" dirty="0">
+                <a:solidFill>
+                  <a:srgbClr val="9AA3C7"/>
+                </a:solidFill>
+                <a:latin typeface="Yu Gothic" pitchFamily="34" charset="0"/>
+                <a:ea typeface="Yu Gothic" pitchFamily="34" charset="-122"/>
+                <a:cs typeface="Yu Gothic" pitchFamily="34" charset="-120"/>
+              </a:rPr>
+              <a:t>バイト求人の会社が実在するかチェック。要請が求める「商業登記電子証明書による法人の本人確認」と同じ方向</a:t>
+            </a:r>
             <a:endParaRPr lang="en-US" sz="1100" dirty="0"/>
           </a:p>
         </p:txBody>
       </p:sp>
       <p:sp>
         <p:nvSpPr>
-          <p:cNvPr id="20" name="Text 18"/>
-          <p:cNvSpPr/>
-          <p:nvPr/>
-        </p:nvSpPr>
-        <p:spPr>
-          <a:xfrm>
-            <a:off x="2286000" y="4809744"/>
-            <a:ext cx="9144000" cy="411480"/>
-          </a:xfrm>
-          <a:prstGeom prst="rect">
-            <a:avLst/>
-          </a:prstGeom>
-          <a:noFill/>
-          <a:ln/>
-        </p:spPr>
-        <p:txBody>
-          <a:bodyPr wrap="square" lIns="0" tIns="0" rIns="0" bIns="0" rtlCol="0" anchor="ctr"/>
-          <a:lstStyle/>
-          <a:p>
-            <a:pPr indent="0" marL="0">
-              <a:buNone/>
-            </a:pPr>
-            <a:r>
-              <a:rPr lang="en-US" sz="1400" b="1" dirty="0">
-                <a:solidFill>
-                  <a:srgbClr val="FFD54D"/>
-                </a:solidFill>
-                <a:latin typeface="Yu Gothic" pitchFamily="34" charset="0"/>
-                <a:ea typeface="Yu Gothic" pitchFamily="34" charset="-122"/>
-                <a:cs typeface="Yu Gothic" pitchFamily="34" charset="-120"/>
-              </a:rPr>
-              <a:t>法人番号公表サイト Web-API</a:t>
-            </a:r>
-            <a:endParaRPr lang="en-US" sz="1400" dirty="0"/>
-          </a:p>
-        </p:txBody>
-      </p:sp>
-      <p:sp>
-        <p:nvSpPr>
-          <p:cNvPr id="21" name="Text 19"/>
-          <p:cNvSpPr/>
-          <p:nvPr/>
-        </p:nvSpPr>
-        <p:spPr>
-          <a:xfrm>
-            <a:off x="2286000" y="5230368"/>
-            <a:ext cx="9144000" cy="548640"/>
-          </a:xfrm>
-          <a:prstGeom prst="rect">
-            <a:avLst/>
-          </a:prstGeom>
-          <a:noFill/>
-          <a:ln/>
-        </p:spPr>
-        <p:txBody>
-          <a:bodyPr wrap="square" lIns="0" tIns="0" rIns="0" bIns="0" rtlCol="0" anchor="ctr"/>
-          <a:lstStyle/>
-          <a:p>
-            <a:pPr indent="0" marL="0">
-              <a:lnSpc>
-                <a:spcPts val="1700"/>
-              </a:lnSpc>
-              <a:buNone/>
-            </a:pPr>
-            <a:r>
-              <a:rPr lang="en-US" sz="1200" dirty="0">
+          <p:cNvPr id="28" name="Text 26"/>
+          <p:cNvSpPr/>
+          <p:nvPr/>
+        </p:nvSpPr>
+        <p:spPr>
+          <a:xfrm>
+            <a:off x="548640" y="6172200"/>
+            <a:ext cx="11064240" cy="274320"/>
+          </a:xfrm>
+          <a:prstGeom prst="rect">
+            <a:avLst/>
+          </a:prstGeom>
+          <a:noFill/>
+          <a:ln/>
+        </p:spPr>
+        <p:txBody>
+          <a:bodyPr wrap="square" lIns="0" tIns="0" rIns="0" bIns="0" rtlCol="0" anchor="ctr"/>
+          <a:lstStyle/>
+          <a:p>
+            <a:pPr indent="0" marL="0">
+              <a:buNone/>
+            </a:pPr>
+            <a:r>
+              <a:rPr lang="en-US" sz="1050" dirty="0">
                 <a:solidFill>
                   <a:srgbClr val="9AA3C7"/>
                 </a:solidFill>
@@ -4809,54 +5073,15 @@
                 <a:ea typeface="Yu Gothic" pitchFamily="34" charset="-122"/>
                 <a:cs typeface="Yu Gothic" pitchFamily="34" charset="-120"/>
               </a:rPr>
-              <a:t>バイト求人の会社が実在するかチェック。闇バイト求人の見分けを制度データで補強</a:t>
-            </a:r>
-            <a:endParaRPr lang="en-US" sz="1200" dirty="0"/>
-          </a:p>
-        </p:txBody>
-      </p:sp>
-      <p:sp>
-        <p:nvSpPr>
-          <p:cNvPr id="22" name="Text 20"/>
-          <p:cNvSpPr/>
-          <p:nvPr/>
-        </p:nvSpPr>
-        <p:spPr>
-          <a:xfrm>
-            <a:off x="548640" y="6035040"/>
-            <a:ext cx="11064240" cy="320040"/>
-          </a:xfrm>
-          <a:prstGeom prst="rect">
-            <a:avLst/>
-          </a:prstGeom>
-          <a:noFill/>
-          <a:ln/>
-        </p:spPr>
-        <p:txBody>
-          <a:bodyPr wrap="square" lIns="0" tIns="0" rIns="0" bIns="0" rtlCol="0" anchor="ctr"/>
-          <a:lstStyle/>
-          <a:p>
-            <a:pPr indent="0" marL="0">
-              <a:buNone/>
-            </a:pPr>
-            <a:r>
-              <a:rPr lang="en-US" sz="1100" dirty="0">
-                <a:solidFill>
-                  <a:srgbClr val="9AA3C7"/>
-                </a:solidFill>
-                <a:latin typeface="Yu Gothic" pitchFamily="34" charset="0"/>
-                <a:ea typeface="Yu Gothic" pitchFamily="34" charset="-122"/>
-                <a:cs typeface="Yu Gothic" pitchFamily="34" charset="-120"/>
-              </a:rPr>
               <a:t>ほか利用予定: 東京都 消費生活相談データ / 金融庁 登録業者一覧 / 東京都 行政区域・人口データ 等</a:t>
             </a:r>
-            <a:endParaRPr lang="en-US" sz="1100" dirty="0"/>
-          </a:p>
-        </p:txBody>
-      </p:sp>
-      <p:sp>
-        <p:nvSpPr>
-          <p:cNvPr id="23" name="Text 21"/>
+            <a:endParaRPr lang="en-US" sz="1050" dirty="0"/>
+          </a:p>
+        </p:txBody>
+      </p:sp>
+      <p:sp>
+        <p:nvSpPr>
+          <p:cNvPr id="29" name="Text 27"/>
           <p:cNvSpPr/>
           <p:nvPr/>
         </p:nvSpPr>
@@ -4895,7 +5120,7 @@
       </p:sp>
       <p:sp>
         <p:nvSpPr>
-          <p:cNvPr id="24" name="Text 22"/>
+          <p:cNvPr id="30" name="Text 28"/>
           <p:cNvSpPr/>
           <p:nvPr/>
         </p:nvSpPr>

--- a/yamibare-pitch.pptx
+++ b/yamibare-pitch.pptx
@@ -2531,7 +2531,7 @@
                 <a:ea typeface="Yu Gothic" pitchFamily="34" charset="-122"/>
                 <a:cs typeface="Yu Gothic" pitchFamily="34" charset="-120"/>
               </a:rPr>
-              <a:t>貼る</a:t>
+              <a:t>知る・貼る</a:t>
             </a:r>
             <a:endParaRPr lang="en-US" sz="2000" dirty="0"/>
           </a:p>
@@ -2573,7 +2573,7 @@
                 <a:ea typeface="Yu Gothic" pitchFamily="34" charset="-122"/>
                 <a:cs typeface="Yu Gothic" pitchFamily="34" charset="-120"/>
               </a:rPr>
-              <a:t>LINE風チャットに、怪しいDM・バイト募集・儲け話をそのまま貼る。読む教材ではなく"使う道具"</a:t>
+              <a:t>4コマ漫画で手口を知り、届いた怪しいDMはLINE風チャットにそのまま貼る。読む教材ではなく"使う道具"</a:t>
             </a:r>
             <a:endParaRPr lang="en-US" sz="1250" dirty="0"/>
           </a:p>
@@ -3608,12 +3608,12 @@
         </p:nvSpPr>
         <p:spPr>
           <a:xfrm>
-            <a:off x="4206240" y="1874520"/>
-            <a:ext cx="7406640" cy="960120"/>
+            <a:off x="4206240" y="1828800"/>
+            <a:ext cx="7406640" cy="795528"/>
           </a:xfrm>
           <a:prstGeom prst="ROUNDED_RECTANGLE">
             <a:avLst>
-              <a:gd name="adj" fmla="val 11429"/>
+              <a:gd name="adj" fmla="val 13793"/>
             </a:avLst>
           </a:prstGeom>
           <a:solidFill>
@@ -3635,24 +3635,24 @@
         </p:nvSpPr>
         <p:spPr>
           <a:xfrm>
-            <a:off x="4480560" y="1984248"/>
-            <a:ext cx="6949440" cy="365760"/>
-          </a:xfrm>
-          <a:prstGeom prst="rect">
-            <a:avLst/>
-          </a:prstGeom>
-          <a:noFill/>
-          <a:ln/>
-        </p:spPr>
-        <p:txBody>
-          <a:bodyPr wrap="square" lIns="0" tIns="0" rIns="0" bIns="0" rtlCol="0" anchor="ctr"/>
-          <a:lstStyle/>
-          <a:p>
-            <a:pPr indent="0" marL="0">
-              <a:buNone/>
-            </a:pPr>
-            <a:r>
-              <a:rPr lang="en-US" sz="1500" b="1" dirty="0">
+            <a:off x="4480560" y="1901952"/>
+            <a:ext cx="6949440" cy="329184"/>
+          </a:xfrm>
+          <a:prstGeom prst="rect">
+            <a:avLst/>
+          </a:prstGeom>
+          <a:noFill/>
+          <a:ln/>
+        </p:spPr>
+        <p:txBody>
+          <a:bodyPr wrap="square" lIns="0" tIns="0" rIns="0" bIns="0" rtlCol="0" anchor="ctr"/>
+          <a:lstStyle/>
+          <a:p>
+            <a:pPr indent="0" marL="0">
+              <a:buNone/>
+            </a:pPr>
+            <a:r>
+              <a:rPr lang="en-US" sz="1400" b="1" dirty="0">
                 <a:solidFill>
                   <a:srgbClr val="FFD54D"/>
                 </a:solidFill>
@@ -3660,9 +3660,9 @@
                 <a:ea typeface="Yu Gothic" pitchFamily="34" charset="-122"/>
                 <a:cs typeface="Yu Gothic" pitchFamily="34" charset="-120"/>
               </a:rPr>
-              <a:t>🚩 根拠を見せる判定</a:t>
-            </a:r>
-            <a:endParaRPr lang="en-US" sz="1500" dirty="0"/>
+              <a:t>📰 今日の手口マンガ</a:t>
+            </a:r>
+            <a:endParaRPr lang="en-US" sz="1400" dirty="0"/>
           </a:p>
         </p:txBody>
       </p:sp>
@@ -3674,24 +3674,24 @@
         </p:nvSpPr>
         <p:spPr>
           <a:xfrm>
-            <a:off x="4480560" y="2350008"/>
-            <a:ext cx="6949440" cy="411480"/>
-          </a:xfrm>
-          <a:prstGeom prst="rect">
-            <a:avLst/>
-          </a:prstGeom>
-          <a:noFill/>
-          <a:ln/>
-        </p:spPr>
-        <p:txBody>
-          <a:bodyPr wrap="square" lIns="0" tIns="0" rIns="0" bIns="0" rtlCol="0" anchor="ctr"/>
-          <a:lstStyle/>
-          <a:p>
-            <a:pPr indent="0" marL="0">
-              <a:buNone/>
-            </a:pPr>
-            <a:r>
-              <a:rPr lang="en-US" sz="1250" dirty="0">
+            <a:off x="4480560" y="2231136"/>
+            <a:ext cx="6949440" cy="347472"/>
+          </a:xfrm>
+          <a:prstGeom prst="rect">
+            <a:avLst/>
+          </a:prstGeom>
+          <a:noFill/>
+          <a:ln/>
+        </p:spPr>
+        <p:txBody>
+          <a:bodyPr wrap="square" lIns="0" tIns="0" rIns="0" bIns="0" rtlCol="0" anchor="ctr"/>
+          <a:lstStyle/>
+          <a:p>
+            <a:pPr indent="0" marL="0">
+              <a:buNone/>
+            </a:pPr>
+            <a:r>
+              <a:rPr lang="en-US" sz="1150" dirty="0">
                 <a:solidFill>
                   <a:srgbClr val="9AA3C7"/>
                 </a:solidFill>
@@ -3699,9 +3699,9 @@
                 <a:ea typeface="Yu Gothic" pitchFamily="34" charset="-122"/>
                 <a:cs typeface="Yu Gothic" pitchFamily="34" charset="-120"/>
               </a:rPr>
-              <a:t>「どの言葉が危険か」を1つずつ提示。ヤバ度メーターで直感的に</a:t>
-            </a:r>
-            <a:endParaRPr lang="en-US" sz="1250" dirty="0"/>
+              <a:t>実際の手口を4コマで。読んだ直後に同じ手口を判定で試せる(全6本・日替わり)</a:t>
+            </a:r>
+            <a:endParaRPr lang="en-US" sz="1150" dirty="0"/>
           </a:p>
         </p:txBody>
       </p:sp>
@@ -3713,12 +3713,12 @@
         </p:nvSpPr>
         <p:spPr>
           <a:xfrm>
-            <a:off x="4206240" y="2990088"/>
-            <a:ext cx="7406640" cy="960120"/>
+            <a:off x="4206240" y="2734056"/>
+            <a:ext cx="7406640" cy="795528"/>
           </a:xfrm>
           <a:prstGeom prst="ROUNDED_RECTANGLE">
             <a:avLst>
-              <a:gd name="adj" fmla="val 11429"/>
+              <a:gd name="adj" fmla="val 13793"/>
             </a:avLst>
           </a:prstGeom>
           <a:solidFill>
@@ -3740,24 +3740,24 @@
         </p:nvSpPr>
         <p:spPr>
           <a:xfrm>
-            <a:off x="4480560" y="3099816"/>
-            <a:ext cx="6949440" cy="365760"/>
-          </a:xfrm>
-          <a:prstGeom prst="rect">
-            <a:avLst/>
-          </a:prstGeom>
-          <a:noFill/>
-          <a:ln/>
-        </p:spPr>
-        <p:txBody>
-          <a:bodyPr wrap="square" lIns="0" tIns="0" rIns="0" bIns="0" rtlCol="0" anchor="ctr"/>
-          <a:lstStyle/>
-          <a:p>
-            <a:pPr indent="0" marL="0">
-              <a:buNone/>
-            </a:pPr>
-            <a:r>
-              <a:rPr lang="en-US" sz="1500" b="1" dirty="0">
+            <a:off x="4480560" y="2807208"/>
+            <a:ext cx="6949440" cy="329184"/>
+          </a:xfrm>
+          <a:prstGeom prst="rect">
+            <a:avLst/>
+          </a:prstGeom>
+          <a:noFill/>
+          <a:ln/>
+        </p:spPr>
+        <p:txBody>
+          <a:bodyPr wrap="square" lIns="0" tIns="0" rIns="0" bIns="0" rtlCol="0" anchor="ctr"/>
+          <a:lstStyle/>
+          <a:p>
+            <a:pPr indent="0" marL="0">
+              <a:buNone/>
+            </a:pPr>
+            <a:r>
+              <a:rPr lang="en-US" sz="1400" b="1" dirty="0">
                 <a:solidFill>
                   <a:srgbClr val="FFD54D"/>
                 </a:solidFill>
@@ -3765,9 +3765,9 @@
                 <a:ea typeface="Yu Gothic" pitchFamily="34" charset="-122"/>
                 <a:cs typeface="Yu Gothic" pitchFamily="34" charset="-120"/>
               </a:rPr>
-              <a:t>📊 実データで自分ごと化</a:t>
-            </a:r>
-            <a:endParaRPr lang="en-US" sz="1500" dirty="0"/>
+              <a:t>🚩 根拠を見せる判定</a:t>
+            </a:r>
+            <a:endParaRPr lang="en-US" sz="1400" dirty="0"/>
           </a:p>
         </p:txBody>
       </p:sp>
@@ -3779,24 +3779,24 @@
         </p:nvSpPr>
         <p:spPr>
           <a:xfrm>
-            <a:off x="4480560" y="3465576"/>
-            <a:ext cx="6949440" cy="411480"/>
-          </a:xfrm>
-          <a:prstGeom prst="rect">
-            <a:avLst/>
-          </a:prstGeom>
-          <a:noFill/>
-          <a:ln/>
-        </p:spPr>
-        <p:txBody>
-          <a:bodyPr wrap="square" lIns="0" tIns="0" rIns="0" bIns="0" rtlCol="0" anchor="ctr"/>
-          <a:lstStyle/>
-          <a:p>
-            <a:pPr indent="0" marL="0">
-              <a:buNone/>
-            </a:pPr>
-            <a:r>
-              <a:rPr lang="en-US" sz="1250" dirty="0">
+            <a:off x="4480560" y="3136392"/>
+            <a:ext cx="6949440" cy="347472"/>
+          </a:xfrm>
+          <a:prstGeom prst="rect">
+            <a:avLst/>
+          </a:prstGeom>
+          <a:noFill/>
+          <a:ln/>
+        </p:spPr>
+        <p:txBody>
+          <a:bodyPr wrap="square" lIns="0" tIns="0" rIns="0" bIns="0" rtlCol="0" anchor="ctr"/>
+          <a:lstStyle/>
+          <a:p>
+            <a:pPr indent="0" marL="0">
+              <a:buNone/>
+            </a:pPr>
+            <a:r>
+              <a:rPr lang="en-US" sz="1150" dirty="0">
                 <a:solidFill>
                   <a:srgbClr val="9AA3C7"/>
                 </a:solidFill>
@@ -3804,9 +3804,9 @@
                 <a:ea typeface="Yu Gothic" pitchFamily="34" charset="-122"/>
                 <a:cs typeface="Yu Gothic" pitchFamily="34" charset="-120"/>
               </a:rPr>
-              <a:t>「あなたの年代で急増」「あなたの区で688件」— 公的統計が根拠</a:t>
-            </a:r>
-            <a:endParaRPr lang="en-US" sz="1250" dirty="0"/>
+              <a:t>「どの言葉が危険か」を1つずつ提示。ヤバ度メーターで直感的に</a:t>
+            </a:r>
+            <a:endParaRPr lang="en-US" sz="1150" dirty="0"/>
           </a:p>
         </p:txBody>
       </p:sp>
@@ -3818,12 +3818,12 @@
         </p:nvSpPr>
         <p:spPr>
           <a:xfrm>
-            <a:off x="4206240" y="4105656"/>
-            <a:ext cx="7406640" cy="960120"/>
+            <a:off x="4206240" y="3639312"/>
+            <a:ext cx="7406640" cy="795528"/>
           </a:xfrm>
           <a:prstGeom prst="ROUNDED_RECTANGLE">
             <a:avLst>
-              <a:gd name="adj" fmla="val 11429"/>
+              <a:gd name="adj" fmla="val 13793"/>
             </a:avLst>
           </a:prstGeom>
           <a:solidFill>
@@ -3845,24 +3845,24 @@
         </p:nvSpPr>
         <p:spPr>
           <a:xfrm>
-            <a:off x="4480560" y="4215384"/>
-            <a:ext cx="6949440" cy="365760"/>
-          </a:xfrm>
-          <a:prstGeom prst="rect">
-            <a:avLst/>
-          </a:prstGeom>
-          <a:noFill/>
-          <a:ln/>
-        </p:spPr>
-        <p:txBody>
-          <a:bodyPr wrap="square" lIns="0" tIns="0" rIns="0" bIns="0" rtlCol="0" anchor="ctr"/>
-          <a:lstStyle/>
-          <a:p>
-            <a:pPr indent="0" marL="0">
-              <a:buNone/>
-            </a:pPr>
-            <a:r>
-              <a:rPr lang="en-US" sz="1500" b="1" dirty="0">
+            <a:off x="4480560" y="3712464"/>
+            <a:ext cx="6949440" cy="329184"/>
+          </a:xfrm>
+          <a:prstGeom prst="rect">
+            <a:avLst/>
+          </a:prstGeom>
+          <a:noFill/>
+          <a:ln/>
+        </p:spPr>
+        <p:txBody>
+          <a:bodyPr wrap="square" lIns="0" tIns="0" rIns="0" bIns="0" rtlCol="0" anchor="ctr"/>
+          <a:lstStyle/>
+          <a:p>
+            <a:pPr indent="0" marL="0">
+              <a:buNone/>
+            </a:pPr>
+            <a:r>
+              <a:rPr lang="en-US" sz="1400" b="1" dirty="0">
                 <a:solidFill>
                   <a:srgbClr val="FFD54D"/>
                 </a:solidFill>
@@ -3870,9 +3870,9 @@
                 <a:ea typeface="Yu Gothic" pitchFamily="34" charset="-122"/>
                 <a:cs typeface="Yu Gothic" pitchFamily="34" charset="-120"/>
               </a:rPr>
-              <a:t>🆘 相談まで1タップ</a:t>
-            </a:r>
-            <a:endParaRPr lang="en-US" sz="1500" dirty="0"/>
+              <a:t>📊 実データで自分ごと化</a:t>
+            </a:r>
+            <a:endParaRPr lang="en-US" sz="1400" dirty="0"/>
           </a:p>
         </p:txBody>
       </p:sp>
@@ -3884,24 +3884,24 @@
         </p:nvSpPr>
         <p:spPr>
           <a:xfrm>
-            <a:off x="4480560" y="4581144"/>
-            <a:ext cx="6949440" cy="411480"/>
-          </a:xfrm>
-          <a:prstGeom prst="rect">
-            <a:avLst/>
-          </a:prstGeom>
-          <a:noFill/>
-          <a:ln/>
-        </p:spPr>
-        <p:txBody>
-          <a:bodyPr wrap="square" lIns="0" tIns="0" rIns="0" bIns="0" rtlCol="0" anchor="ctr"/>
-          <a:lstStyle/>
-          <a:p>
-            <a:pPr indent="0" marL="0">
-              <a:buNone/>
-            </a:pPr>
-            <a:r>
-              <a:rPr lang="en-US" sz="1250" dirty="0">
+            <a:off x="4480560" y="4041648"/>
+            <a:ext cx="6949440" cy="347472"/>
+          </a:xfrm>
+          <a:prstGeom prst="rect">
+            <a:avLst/>
+          </a:prstGeom>
+          <a:noFill/>
+          <a:ln/>
+        </p:spPr>
+        <p:txBody>
+          <a:bodyPr wrap="square" lIns="0" tIns="0" rIns="0" bIns="0" rtlCol="0" anchor="ctr"/>
+          <a:lstStyle/>
+          <a:p>
+            <a:pPr indent="0" marL="0">
+              <a:buNone/>
+            </a:pPr>
+            <a:r>
+              <a:rPr lang="en-US" sz="1150" dirty="0">
                 <a:solidFill>
                   <a:srgbClr val="9AA3C7"/>
                 </a:solidFill>
@@ -3909,9 +3909,9 @@
                 <a:ea typeface="Yu Gothic" pitchFamily="34" charset="-122"/>
                 <a:cs typeface="Yu Gothic" pitchFamily="34" charset="-120"/>
               </a:rPr>
-              <a:t>#9110・ヤング・テレホン・188へ発信。誰にも知られず相談できる</a:t>
-            </a:r>
-            <a:endParaRPr lang="en-US" sz="1250" dirty="0"/>
+              <a:t>「あなたの年代で急増」「あなたの区で688件」— 公的統計が根拠</a:t>
+            </a:r>
+            <a:endParaRPr lang="en-US" sz="1150" dirty="0"/>
           </a:p>
         </p:txBody>
       </p:sp>
@@ -3923,12 +3923,12 @@
         </p:nvSpPr>
         <p:spPr>
           <a:xfrm>
-            <a:off x="4206240" y="5221224"/>
-            <a:ext cx="7406640" cy="960120"/>
+            <a:off x="4206240" y="4544568"/>
+            <a:ext cx="7406640" cy="795528"/>
           </a:xfrm>
           <a:prstGeom prst="ROUNDED_RECTANGLE">
             <a:avLst>
-              <a:gd name="adj" fmla="val 11429"/>
+              <a:gd name="adj" fmla="val 13793"/>
             </a:avLst>
           </a:prstGeom>
           <a:solidFill>
@@ -3950,24 +3950,24 @@
         </p:nvSpPr>
         <p:spPr>
           <a:xfrm>
-            <a:off x="4480560" y="5330952"/>
-            <a:ext cx="6949440" cy="365760"/>
-          </a:xfrm>
-          <a:prstGeom prst="rect">
-            <a:avLst/>
-          </a:prstGeom>
-          <a:noFill/>
-          <a:ln/>
-        </p:spPr>
-        <p:txBody>
-          <a:bodyPr wrap="square" lIns="0" tIns="0" rIns="0" bIns="0" rtlCol="0" anchor="ctr"/>
-          <a:lstStyle/>
-          <a:p>
-            <a:pPr indent="0" marL="0">
-              <a:buNone/>
-            </a:pPr>
-            <a:r>
-              <a:rPr lang="en-US" sz="1500" b="1" dirty="0">
+            <a:off x="4480560" y="4617720"/>
+            <a:ext cx="6949440" cy="329184"/>
+          </a:xfrm>
+          <a:prstGeom prst="rect">
+            <a:avLst/>
+          </a:prstGeom>
+          <a:noFill/>
+          <a:ln/>
+        </p:spPr>
+        <p:txBody>
+          <a:bodyPr wrap="square" lIns="0" tIns="0" rIns="0" bIns="0" rtlCol="0" anchor="ctr"/>
+          <a:lstStyle/>
+          <a:p>
+            <a:pPr indent="0" marL="0">
+              <a:buNone/>
+            </a:pPr>
+            <a:r>
+              <a:rPr lang="en-US" sz="1400" b="1" dirty="0">
                 <a:solidFill>
                   <a:srgbClr val="FFD54D"/>
                 </a:solidFill>
@@ -3975,38 +3975,143 @@
                 <a:ea typeface="Yu Gothic" pitchFamily="34" charset="-122"/>
                 <a:cs typeface="Yu Gothic" pitchFamily="34" charset="-120"/>
               </a:rPr>
+              <a:t>🆘 相談まで1タップ</a:t>
+            </a:r>
+            <a:endParaRPr lang="en-US" sz="1400" dirty="0"/>
+          </a:p>
+        </p:txBody>
+      </p:sp>
+      <p:sp>
+        <p:nvSpPr>
+          <p:cNvPr id="26" name="Text 24"/>
+          <p:cNvSpPr/>
+          <p:nvPr/>
+        </p:nvSpPr>
+        <p:spPr>
+          <a:xfrm>
+            <a:off x="4480560" y="4946904"/>
+            <a:ext cx="6949440" cy="347472"/>
+          </a:xfrm>
+          <a:prstGeom prst="rect">
+            <a:avLst/>
+          </a:prstGeom>
+          <a:noFill/>
+          <a:ln/>
+        </p:spPr>
+        <p:txBody>
+          <a:bodyPr wrap="square" lIns="0" tIns="0" rIns="0" bIns="0" rtlCol="0" anchor="ctr"/>
+          <a:lstStyle/>
+          <a:p>
+            <a:pPr indent="0" marL="0">
+              <a:buNone/>
+            </a:pPr>
+            <a:r>
+              <a:rPr lang="en-US" sz="1150" dirty="0">
+                <a:solidFill>
+                  <a:srgbClr val="9AA3C7"/>
+                </a:solidFill>
+                <a:latin typeface="Yu Gothic" pitchFamily="34" charset="0"/>
+                <a:ea typeface="Yu Gothic" pitchFamily="34" charset="-122"/>
+                <a:cs typeface="Yu Gothic" pitchFamily="34" charset="-120"/>
+              </a:rPr>
+              <a:t>#9110・ヤング・テレホン・188へ発信。誰にも知られず相談できる</a:t>
+            </a:r>
+            <a:endParaRPr lang="en-US" sz="1150" dirty="0"/>
+          </a:p>
+        </p:txBody>
+      </p:sp>
+      <p:sp>
+        <p:nvSpPr>
+          <p:cNvPr id="27" name="Shape 25"/>
+          <p:cNvSpPr/>
+          <p:nvPr/>
+        </p:nvSpPr>
+        <p:spPr>
+          <a:xfrm>
+            <a:off x="4206240" y="5449824"/>
+            <a:ext cx="7406640" cy="795528"/>
+          </a:xfrm>
+          <a:prstGeom prst="ROUNDED_RECTANGLE">
+            <a:avLst>
+              <a:gd name="adj" fmla="val 13793"/>
+            </a:avLst>
+          </a:prstGeom>
+          <a:solidFill>
+            <a:srgbClr val="1E2440"/>
+          </a:solidFill>
+          <a:ln w="12700">
+            <a:solidFill>
+              <a:srgbClr val="2A3155"/>
+            </a:solidFill>
+            <a:prstDash val="solid"/>
+          </a:ln>
+        </p:spPr>
+      </p:sp>
+      <p:sp>
+        <p:nvSpPr>
+          <p:cNvPr id="28" name="Text 26"/>
+          <p:cNvSpPr/>
+          <p:nvPr/>
+        </p:nvSpPr>
+        <p:spPr>
+          <a:xfrm>
+            <a:off x="4480560" y="5522976"/>
+            <a:ext cx="6949440" cy="329184"/>
+          </a:xfrm>
+          <a:prstGeom prst="rect">
+            <a:avLst/>
+          </a:prstGeom>
+          <a:noFill/>
+          <a:ln/>
+        </p:spPr>
+        <p:txBody>
+          <a:bodyPr wrap="square" lIns="0" tIns="0" rIns="0" bIns="0" rtlCol="0" anchor="ctr"/>
+          <a:lstStyle/>
+          <a:p>
+            <a:pPr indent="0" marL="0">
+              <a:buNone/>
+            </a:pPr>
+            <a:r>
+              <a:rPr lang="en-US" sz="1400" b="1" dirty="0">
+                <a:solidFill>
+                  <a:srgbClr val="FFD54D"/>
+                </a:solidFill>
+                <a:latin typeface="Yu Gothic" pitchFamily="34" charset="0"/>
+                <a:ea typeface="Yu Gothic" pitchFamily="34" charset="-122"/>
+                <a:cs typeface="Yu Gothic" pitchFamily="34" charset="-120"/>
+              </a:rPr>
               <a:t>📸 シェアカード</a:t>
             </a:r>
-            <a:endParaRPr lang="en-US" sz="1500" dirty="0"/>
-          </a:p>
-        </p:txBody>
-      </p:sp>
-      <p:sp>
-        <p:nvSpPr>
-          <p:cNvPr id="26" name="Text 24"/>
-          <p:cNvSpPr/>
-          <p:nvPr/>
-        </p:nvSpPr>
-        <p:spPr>
-          <a:xfrm>
-            <a:off x="4480560" y="5696712"/>
-            <a:ext cx="6949440" cy="411480"/>
-          </a:xfrm>
-          <a:prstGeom prst="rect">
-            <a:avLst/>
-          </a:prstGeom>
-          <a:noFill/>
-          <a:ln/>
-        </p:spPr>
-        <p:txBody>
-          <a:bodyPr wrap="square" lIns="0" tIns="0" rIns="0" bIns="0" rtlCol="0" anchor="ctr"/>
-          <a:lstStyle/>
-          <a:p>
-            <a:pPr indent="0" marL="0">
-              <a:buNone/>
-            </a:pPr>
-            <a:r>
-              <a:rPr lang="en-US" sz="1250" dirty="0">
+            <a:endParaRPr lang="en-US" sz="1400" dirty="0"/>
+          </a:p>
+        </p:txBody>
+      </p:sp>
+      <p:sp>
+        <p:nvSpPr>
+          <p:cNvPr id="29" name="Text 27"/>
+          <p:cNvSpPr/>
+          <p:nvPr/>
+        </p:nvSpPr>
+        <p:spPr>
+          <a:xfrm>
+            <a:off x="4480560" y="5852160"/>
+            <a:ext cx="6949440" cy="347472"/>
+          </a:xfrm>
+          <a:prstGeom prst="rect">
+            <a:avLst/>
+          </a:prstGeom>
+          <a:noFill/>
+          <a:ln/>
+        </p:spPr>
+        <p:txBody>
+          <a:bodyPr wrap="square" lIns="0" tIns="0" rIns="0" bIns="0" rtlCol="0" anchor="ctr"/>
+          <a:lstStyle/>
+          <a:p>
+            <a:pPr indent="0" marL="0">
+              <a:buNone/>
+            </a:pPr>
+            <a:r>
+              <a:rPr lang="en-US" sz="1150" dirty="0">
                 <a:solidFill>
                   <a:srgbClr val="9AA3C7"/>
                 </a:solidFill>
@@ -4016,13 +4121,13 @@
               </a:rPr>
               <a:t>判定結果をPNGカード化。友達に回して「守る側」を増やす</a:t>
             </a:r>
-            <a:endParaRPr lang="en-US" sz="1250" dirty="0"/>
-          </a:p>
-        </p:txBody>
-      </p:sp>
-      <p:sp>
-        <p:nvSpPr>
-          <p:cNvPr id="27" name="Text 25"/>
+            <a:endParaRPr lang="en-US" sz="1150" dirty="0"/>
+          </a:p>
+        </p:txBody>
+      </p:sp>
+      <p:sp>
+        <p:nvSpPr>
+          <p:cNvPr id="30" name="Text 28"/>
           <p:cNvSpPr/>
           <p:nvPr/>
         </p:nvSpPr>
@@ -4061,7 +4166,7 @@
       </p:sp>
       <p:sp>
         <p:nvSpPr>
-          <p:cNvPr id="28" name="Text 26"/>
+          <p:cNvPr id="31" name="Text 29"/>
           <p:cNvSpPr/>
           <p:nvPr/>
         </p:nvSpPr>

--- a/yamibare-pitch.pptx
+++ b/yamibare-pitch.pptx
@@ -2740,7 +2740,7 @@
                 <a:ea typeface="Yu Gothic" pitchFamily="34" charset="-122"/>
                 <a:cs typeface="Yu Gothic" pitchFamily="34" charset="-120"/>
               </a:rPr>
-              <a:t>ヤバ度0〜99と「引っかかった言葉」を根拠つきで表示。8カテゴリ(闇バイト/ニセ警察/SNS投資/ロマンス他)</a:t>
+              <a:t>ヤバ度0〜99と「引っかかった言葉」を根拠つきで表示。9カテゴリ(闇バイト/ニセ警察/なりすまし広告/SNS投資他)</a:t>
             </a:r>
             <a:endParaRPr lang="en-US" sz="1250" dirty="0"/>
           </a:p>

--- a/yamibare-pitch.pptx
+++ b/yamibare-pitch.pptx
@@ -2201,7 +2201,7 @@
                 <a:ea typeface="Yu Gothic" pitchFamily="34" charset="-122"/>
                 <a:cs typeface="Yu Gothic" pitchFamily="34" charset="-120"/>
               </a:rPr>
-              <a:t>入口は日常のSNS広告だ。国は2026年8月7日、8省庁連名でGoogle・Meta・TikTok・X・LINEヤフーに「なりすまし詐欺広告」対策を要請した。</a:t>
+              <a:t>入口は日常のSNS広告だ。国は2026年8月7日、7省庁連名でGoogle・Meta・TikTok・X・LINEヤフーに「なりすまし詐欺広告」対策を要請した。</a:t>
             </a:r>
             <a:pPr indent="0" marL="0">
               <a:lnSpc>
@@ -4789,7 +4789,7 @@
                 <a:ea typeface="Yu Gothic" pitchFamily="34" charset="-122"/>
                 <a:cs typeface="Yu Gothic" pitchFamily="34" charset="-120"/>
               </a:rPr>
-              <a:t>8省庁</a:t>
+              <a:t>7省庁</a:t>
             </a:r>
             <a:endParaRPr lang="en-US" sz="1450" dirty="0"/>
           </a:p>
